--- a/learning/P01_zephyr_make_project/slides/P010_CMake缓存与构建排错_Windows.pptx
+++ b/learning/P01_zephyr_make_project/slides/P010_CMake缓存与构建排错_Windows.pptx
@@ -24183,7 +24183,16 @@
               <a:rPr u="sng">
                 <a:hlinkClick r:id="R1fd50b8310bc4f5f"/>
               </a:rPr>
-              <a:t>依据：doc/build/cmake/index.rst</a:t>
+              <a:t>依据：</a:t>
+            </a:r>
+            <a:r>
+              <a:rPr u="sng">
+                <a:solidFill>
+                  <a:srgbClr val="0070C0"/>
+                </a:solidFill>
+                <a:hlinkClick r:id="R1fd50b8310bc4f5f"/>
+              </a:rPr>
+              <a:t>doc/build/cmake/index.rst</a:t>
             </a:r>
           </a:p>
         </p:txBody>
@@ -24331,6 +24340,107 @@
               <a:ea typeface="Microsoft YaHei"/>
               <a:cs typeface="Microsoft YaHei"/>
             </a:endParaRPr>
+          </a:p>
+        </p:txBody>
+      </p:sp>
+      <p:sp>
+        <p:nvSpPr>
+          <p:cNvPr id="15" name="Semantic color legend">
+            <a:extLst>
+              <a:ext uri="{FF2B5EF4-FFF2-40B4-BE49-F238E27FC236}">
+                <a16:creationId xmlns:a16="http://schemas.microsoft.com/office/drawing/2014/main" id="{39154CEE-9E0E-4815-8A42-342F49989EDD}"/>
+              </a:ext>
+            </a:extLst>
+          </p:cNvPr>
+          <p:cNvSpPr>
+            <a:spLocks noGrp="1"/>
+          </p:cNvSpPr>
+          <p:nvPr/>
+        </p:nvSpPr>
+        <p:spPr>
+          <a:xfrm>
+            <a:off x="609600" y="5314950"/>
+            <a:ext cx="10972800" cy="342900"/>
+          </a:xfrm>
+          <a:prstGeom prst="rect">
+            <a:avLst/>
+          </a:prstGeom>
+          <a:noFill/>
+          <a:ln w="0">
+            <a:noFill/>
+          </a:ln>
+        </p:spPr>
+        <p:txBody>
+          <a:bodyPr>
+            <a:noAutofit/>
+          </a:bodyPr>
+          <a:lstStyle>
+            <a:defPPr>
+              <a:defRPr sz="1575">
+                <a:solidFill>
+                  <a:srgbClr val="646173"/>
+                </a:solidFill>
+                <a:latin typeface="Microsoft YaHei"/>
+                <a:ea typeface="Microsoft YaHei"/>
+                <a:cs typeface="Microsoft YaHei"/>
+              </a:defRPr>
+            </a:defPPr>
+          </a:lstStyle>
+          <a:p>
+            <a:pPr>
+              <a:defRPr sz="1575">
+                <a:solidFill>
+                  <a:srgbClr val="646173"/>
+                </a:solidFill>
+                <a:latin typeface="Microsoft YaHei"/>
+                <a:ea typeface="Microsoft YaHei"/>
+                <a:cs typeface="Microsoft YaHei"/>
+              </a:defRPr>
+            </a:pPr>
+            <a:r>
+              <a:t>阅读标色： </a:t>
+            </a:r>
+            <a:r>
+              <a:rPr>
+                <a:solidFill>
+                  <a:srgbClr val="B84E00"/>
+                </a:solidFill>
+              </a:rPr>
+              <a:t>变量 / 参数</a:t>
+            </a:r>
+            <a:r>
+              <a:t>     </a:t>
+            </a:r>
+            <a:r>
+              <a:rPr>
+                <a:solidFill>
+                  <a:srgbClr val="0070C0"/>
+                </a:solidFill>
+              </a:rPr>
+              <a:t>文件 / 路径</a:t>
+            </a:r>
+            <a:r>
+              <a:t>     </a:t>
+            </a:r>
+            <a:r>
+              <a:rPr>
+                <a:solidFill>
+                  <a:srgbClr val="087B3D"/>
+                </a:solidFill>
+              </a:rPr>
+              <a:t>接口函数</a:t>
+            </a:r>
+            <a:r>
+              <a:t>     </a:t>
+            </a:r>
+            <a:r>
+              <a:rPr>
+                <a:solidFill>
+                  <a:srgbClr val="A02B93"/>
+                </a:solidFill>
+              </a:rPr>
+              <a:t>终端命令</a:t>
+            </a:r>
           </a:p>
         </p:txBody>
       </p:sp>
@@ -25166,7 +25276,23 @@
                   <a:srgbClr val="A02B93"/>
                 </a:solidFill>
               </a:rPr>
-              <a:t>cmake --install</a:t>
+              <a:t>cmake</a:t>
+            </a:r>
+            <a:r>
+              <a:rPr>
+                <a:solidFill>
+                  <a:srgbClr val="A02B93"/>
+                </a:solidFill>
+              </a:rPr>
+              <a:t> </a:t>
+            </a:r>
+            <a:r>
+              <a:rPr>
+                <a:solidFill>
+                  <a:srgbClr val="B84E00"/>
+                </a:solidFill>
+              </a:rPr>
+              <a:t>--install</a:t>
             </a:r>
             <a:r>
               <a:rPr sz="1950" b="0">
@@ -25317,7 +25443,16 @@
               <a:rPr u="sng">
                 <a:hlinkClick r:id="rId4"/>
               </a:rPr>
-              <a:t>源码定位：CMakeLists.txt</a:t>
+              <a:t>源码定位：</a:t>
+            </a:r>
+            <a:r>
+              <a:rPr u="sng">
+                <a:solidFill>
+                  <a:srgbClr val="0070C0"/>
+                </a:solidFill>
+                <a:hlinkClick r:id="rId4"/>
+              </a:rPr>
+              <a:t>CMakeLists.txt</a:t>
             </a:r>
           </a:p>
         </p:txBody>
@@ -26122,7 +26257,31 @@
                 <a:cs typeface="Microsoft YaHei"/>
                 <a:hlinkClick r:id="rId4"/>
               </a:rPr>
-              <a:t>实现定位：cmake/modules/extensions.cmake · 4088 行附近</a:t>
+              <a:t>实现定位：</a:t>
+            </a:r>
+            <a:r>
+              <a:rPr sz="1275" b="0">
+                <a:solidFill>
+                  <a:srgbClr val="0070C0"/>
+                </a:solidFill>
+                <a:latin typeface="Microsoft YaHei"/>
+                <a:ea typeface="Microsoft YaHei"/>
+                <a:cs typeface="Microsoft YaHei"/>
+                <a:hlinkClick r:id="rId4"/>
+              </a:rPr>
+              <a:t>cmake/modules/extensions.cmake</a:t>
+            </a:r>
+            <a:r>
+              <a:rPr sz="1275" b="0">
+                <a:solidFill>
+                  <a:srgbClr val="397589"/>
+                </a:solidFill>
+                <a:latin typeface="Microsoft YaHei"/>
+                <a:ea typeface="Microsoft YaHei"/>
+                <a:cs typeface="Microsoft YaHei"/>
+                <a:hlinkClick r:id="rId4"/>
+              </a:rPr>
+              <a:t> · 4088 行附近</a:t>
             </a:r>
           </a:p>
         </p:txBody>
@@ -27021,7 +27180,7 @@
             <a:r>
               <a:rPr sz="1725">
                 <a:solidFill>
-                  <a:srgbClr val="29263B"/>
+                  <a:srgbClr val="0070C0"/>
                 </a:solidFill>
                 <a:latin typeface="Microsoft YaHei"/>
                 <a:ea typeface="Microsoft YaHei"/>
@@ -27319,7 +27478,7 @@
             <a:r>
               <a:rPr sz="1725">
                 <a:solidFill>
-                  <a:srgbClr val="29263B"/>
+                  <a:srgbClr val="0070C0"/>
                 </a:solidFill>
                 <a:latin typeface="Microsoft YaHei"/>
                 <a:ea typeface="Microsoft YaHei"/>
@@ -27393,7 +27552,7 @@
             <a:r>
               <a:rPr sz="1725">
                 <a:solidFill>
-                  <a:srgbClr val="29263B"/>
+                  <a:srgbClr val="0070C0"/>
                 </a:solidFill>
                 <a:latin typeface="Microsoft YaHei"/>
                 <a:ea typeface="Microsoft YaHei"/>
@@ -27716,7 +27875,16 @@
               <a:rPr u="sng">
                 <a:hlinkClick r:id="rId4"/>
               </a:rPr>
-              <a:t>源码定位：doc/develop/application/index.rst</a:t>
+              <a:t>源码定位：</a:t>
+            </a:r>
+            <a:r>
+              <a:rPr u="sng">
+                <a:solidFill>
+                  <a:srgbClr val="0070C0"/>
+                </a:solidFill>
+                <a:hlinkClick r:id="rId4"/>
+              </a:rPr>
+              <a:t>doc/develop/application/index.rst</a:t>
             </a:r>
           </a:p>
         </p:txBody>
@@ -28119,7 +28287,7 @@
             <a:r>
               <a:rPr sz="1800" b="0">
                 <a:solidFill>
-                  <a:srgbClr val="29263B"/>
+                  <a:srgbClr val="646173"/>
                 </a:solidFill>
                 <a:latin typeface="Consolas"/>
                 <a:ea typeface="Consolas"/>
@@ -28130,7 +28298,7 @@
             <a:r>
               <a:rPr>
                 <a:solidFill>
-                  <a:srgbClr val="A02B93"/>
+                  <a:srgbClr val="646173"/>
                 </a:solidFill>
               </a:rPr>
               <a:t>cmake</a:t>
@@ -28138,7 +28306,7 @@
             <a:r>
               <a:rPr sz="1800" b="0">
                 <a:solidFill>
-                  <a:srgbClr val="29263B"/>
+                  <a:srgbClr val="646173"/>
                 </a:solidFill>
                 <a:latin typeface="Consolas"/>
                 <a:ea typeface="Consolas"/>
@@ -28182,7 +28350,29 @@
                 <a:ea typeface="Consolas"/>
                 <a:cs typeface="Consolas"/>
               </a:rPr>
-              <a:t> -f </a:t>
+              <a:t> </a:t>
+            </a:r>
+            <a:r>
+              <a:rPr sz="1800" b="0">
+                <a:solidFill>
+                  <a:srgbClr val="B84E00"/>
+                </a:solidFill>
+                <a:latin typeface="Consolas"/>
+                <a:ea typeface="Consolas"/>
+                <a:cs typeface="Consolas"/>
+              </a:rPr>
+              <a:t>-f</a:t>
+            </a:r>
+            <a:r>
+              <a:rPr sz="1800" b="0">
+                <a:solidFill>
+                  <a:srgbClr val="29263B"/>
+                </a:solidFill>
+                <a:latin typeface="Consolas"/>
+                <a:ea typeface="Consolas"/>
+                <a:cs typeface="Consolas"/>
+              </a:rPr>
+              <a:t> </a:t>
             </a:r>
             <a:r>
               <a:rPr>
@@ -28693,7 +28883,16 @@
               <a:rPr u="sng">
                 <a:hlinkClick r:id="rId4"/>
               </a:rPr>
-              <a:t>源码定位：doc/develop/application/index.rst</a:t>
+              <a:t>源码定位：</a:t>
+            </a:r>
+            <a:r>
+              <a:rPr u="sng">
+                <a:solidFill>
+                  <a:srgbClr val="0070C0"/>
+                </a:solidFill>
+                <a:hlinkClick r:id="rId4"/>
+              </a:rPr>
+              <a:t>doc/develop/application/index.rst</a:t>
             </a:r>
           </a:p>
         </p:txBody>
@@ -29166,7 +29365,7 @@
             <a:r>
               <a:rPr sz="1800" b="0">
                 <a:solidFill>
-                  <a:srgbClr val="29263B"/>
+                  <a:srgbClr val="646173"/>
                 </a:solidFill>
                 <a:latin typeface="Consolas"/>
                 <a:ea typeface="Consolas"/>
@@ -29177,7 +29376,7 @@
             <a:r>
               <a:rPr>
                 <a:solidFill>
-                  <a:srgbClr val="A02B93"/>
+                  <a:srgbClr val="646173"/>
                 </a:solidFill>
               </a:rPr>
               <a:t>cmake</a:t>
@@ -29185,7 +29384,7 @@
             <a:r>
               <a:rPr sz="1800" b="0">
                 <a:solidFill>
-                  <a:srgbClr val="29263B"/>
+                  <a:srgbClr val="646173"/>
                 </a:solidFill>
                 <a:latin typeface="Consolas"/>
                 <a:ea typeface="Consolas"/>
@@ -29359,7 +29558,7 @@
             <a:r>
               <a:rPr>
                 <a:solidFill>
-                  <a:srgbClr val="B84E00"/>
+                  <a:srgbClr val="29263B"/>
                 </a:solidFill>
               </a:rPr>
               <a:t>STRING</a:t>
@@ -29378,7 +29577,7 @@
             <a:r>
               <a:rPr>
                 <a:solidFill>
-                  <a:srgbClr val="B84E00"/>
+                  <a:srgbClr val="29263B"/>
                 </a:solidFill>
               </a:rPr>
               <a:t>VERBOSE</a:t>
@@ -29405,7 +29604,7 @@
             <a:r>
               <a:rPr sz="1800" b="0">
                 <a:solidFill>
-                  <a:srgbClr val="29263B"/>
+                  <a:srgbClr val="646173"/>
                 </a:solidFill>
                 <a:latin typeface="Consolas"/>
                 <a:ea typeface="Consolas"/>
@@ -29919,7 +30118,16 @@
               <a:rPr u="sng">
                 <a:hlinkClick r:id="rId4"/>
               </a:rPr>
-              <a:t>源码定位：doc/develop/application/index.rst</a:t>
+              <a:t>源码定位：</a:t>
+            </a:r>
+            <a:r>
+              <a:rPr u="sng">
+                <a:solidFill>
+                  <a:srgbClr val="0070C0"/>
+                </a:solidFill>
+                <a:hlinkClick r:id="rId4"/>
+              </a:rPr>
+              <a:t>doc/develop/application/index.rst</a:t>
             </a:r>
           </a:p>
         </p:txBody>
@@ -30392,7 +30600,7 @@
             <a:r>
               <a:rPr sz="1800" b="0">
                 <a:solidFill>
-                  <a:srgbClr val="29263B"/>
+                  <a:srgbClr val="646173"/>
                 </a:solidFill>
                 <a:latin typeface="Consolas"/>
                 <a:ea typeface="Consolas"/>
@@ -30747,7 +30955,29 @@
                 <a:ea typeface="Microsoft YaHei"/>
                 <a:cs typeface="Microsoft YaHei"/>
               </a:rPr>
-              <a:t>本例无其他来源重建该项时，grep 无输出、返回 1 是预期结果。</a:t>
+              <a:t>本例无其他来源重建该项时，</a:t>
+            </a:r>
+            <a:r>
+              <a:rPr sz="1950" b="0">
+                <a:solidFill>
+                  <a:srgbClr val="A02B93"/>
+                </a:solidFill>
+                <a:latin typeface="Microsoft YaHei"/>
+                <a:ea typeface="Microsoft YaHei"/>
+                <a:cs typeface="Microsoft YaHei"/>
+              </a:rPr>
+              <a:t>grep</a:t>
+            </a:r>
+            <a:r>
+              <a:rPr sz="1950" b="0">
+                <a:solidFill>
+                  <a:srgbClr val="29263B"/>
+                </a:solidFill>
+                <a:latin typeface="Microsoft YaHei"/>
+                <a:ea typeface="Microsoft YaHei"/>
+                <a:cs typeface="Microsoft YaHei"/>
+              </a:rPr>
+              <a:t> 无输出、返回 1 是预期结果。</a:t>
             </a:r>
           </a:p>
           <a:p>
@@ -30966,7 +31196,16 @@
               <a:rPr u="sng">
                 <a:hlinkClick r:id="rId4"/>
               </a:rPr>
-              <a:t>源码定位：doc/develop/application/index.rst</a:t>
+              <a:t>源码定位：</a:t>
+            </a:r>
+            <a:r>
+              <a:rPr u="sng">
+                <a:solidFill>
+                  <a:srgbClr val="0070C0"/>
+                </a:solidFill>
+                <a:hlinkClick r:id="rId4"/>
+              </a:rPr>
+              <a:t>doc/develop/application/index.rst</a:t>
             </a:r>
           </a:p>
         </p:txBody>
@@ -31439,7 +31678,7 @@
             <a:r>
               <a:rPr sz="1800" b="0">
                 <a:solidFill>
-                  <a:srgbClr val="29263B"/>
+                  <a:srgbClr val="646173"/>
                 </a:solidFill>
                 <a:latin typeface="Consolas"/>
                 <a:ea typeface="Consolas"/>
@@ -31450,7 +31689,7 @@
             <a:r>
               <a:rPr>
                 <a:solidFill>
-                  <a:srgbClr val="0070C0"/>
+                  <a:srgbClr val="646173"/>
                 </a:solidFill>
               </a:rPr>
               <a:t>cmake/modules/kernel.cmake</a:t>
@@ -31458,7 +31697,7 @@
             <a:r>
               <a:rPr sz="1800" b="0">
                 <a:solidFill>
-                  <a:srgbClr val="29263B"/>
+                  <a:srgbClr val="646173"/>
                 </a:solidFill>
                 <a:latin typeface="Consolas"/>
                 <a:ea typeface="Consolas"/>
@@ -31526,7 +31765,7 @@
             <a:r>
               <a:rPr>
                 <a:solidFill>
-                  <a:srgbClr val="B84E00"/>
+                  <a:srgbClr val="29263B"/>
                 </a:solidFill>
               </a:rPr>
               <a:t>TRUE</a:t>
@@ -31597,7 +31836,29 @@
                 <a:ea typeface="Consolas"/>
                 <a:cs typeface="Consolas"/>
               </a:rPr>
-              <a:t>    "Export CMake compile commands. Used by gen_app_partitions.py script"</a:t>
+              <a:t>    "Export CMake compile commands. Used by </a:t>
+            </a:r>
+            <a:r>
+              <a:rPr sz="1800" b="0">
+                <a:solidFill>
+                  <a:srgbClr val="0070C0"/>
+                </a:solidFill>
+                <a:latin typeface="Consolas"/>
+                <a:ea typeface="Consolas"/>
+                <a:cs typeface="Consolas"/>
+              </a:rPr>
+              <a:t>gen_app_partitions.py</a:t>
+            </a:r>
+            <a:r>
+              <a:rPr sz="1800" b="0">
+                <a:solidFill>
+                  <a:srgbClr val="29263B"/>
+                </a:solidFill>
+                <a:latin typeface="Consolas"/>
+                <a:ea typeface="Consolas"/>
+                <a:cs typeface="Consolas"/>
+              </a:rPr>
+              <a:t> script"</a:t>
             </a:r>
           </a:p>
           <a:p>
@@ -32016,7 +32277,16 @@
               <a:rPr u="sng">
                 <a:hlinkClick r:id="rId4"/>
               </a:rPr>
-              <a:t>源码定位：cmake/modules/kernel.cmake</a:t>
+              <a:t>源码定位：</a:t>
+            </a:r>
+            <a:r>
+              <a:rPr u="sng">
+                <a:solidFill>
+                  <a:srgbClr val="0070C0"/>
+                </a:solidFill>
+                <a:hlinkClick r:id="rId4"/>
+              </a:rPr>
+              <a:t>cmake/modules/kernel.cmake</a:t>
             </a:r>
           </a:p>
         </p:txBody>
@@ -32419,7 +32689,7 @@
             <a:r>
               <a:rPr sz="1800" b="0">
                 <a:solidFill>
-                  <a:srgbClr val="29263B"/>
+                  <a:srgbClr val="646173"/>
                 </a:solidFill>
                 <a:latin typeface="Consolas"/>
                 <a:ea typeface="Consolas"/>
@@ -32430,7 +32700,7 @@
             <a:r>
               <a:rPr>
                 <a:solidFill>
-                  <a:srgbClr val="A02B93"/>
+                  <a:srgbClr val="646173"/>
                 </a:solidFill>
               </a:rPr>
               <a:t>cmake</a:t>
@@ -32438,7 +32708,7 @@
             <a:r>
               <a:rPr sz="1800" b="0">
                 <a:solidFill>
-                  <a:srgbClr val="29263B"/>
+                  <a:srgbClr val="646173"/>
                 </a:solidFill>
                 <a:latin typeface="Consolas"/>
                 <a:ea typeface="Consolas"/>
@@ -32993,7 +33263,16 @@
               <a:rPr u="sng">
                 <a:hlinkClick r:id="rId4"/>
               </a:rPr>
-              <a:t>源码定位：doc/develop/application/index.rst</a:t>
+              <a:t>源码定位：</a:t>
+            </a:r>
+            <a:r>
+              <a:rPr u="sng">
+                <a:solidFill>
+                  <a:srgbClr val="0070C0"/>
+                </a:solidFill>
+                <a:hlinkClick r:id="rId4"/>
+              </a:rPr>
+              <a:t>doc/develop/application/index.rst</a:t>
             </a:r>
           </a:p>
         </p:txBody>
@@ -33605,7 +33884,15 @@
                   <a:srgbClr val="A02B93"/>
                 </a:solidFill>
               </a:rPr>
-              <a:t>west build</a:t>
+              <a:t>west</a:t>
+            </a:r>
+            <a:r>
+              <a:rPr>
+                <a:solidFill>
+                  <a:srgbClr val="A02B93"/>
+                </a:solidFill>
+              </a:rPr>
+              <a:t> build</a:t>
             </a:r>
             <a:r>
               <a:rPr sz="1950" b="0">
@@ -33624,7 +33911,15 @@
                   <a:srgbClr val="B84E00"/>
                 </a:solidFill>
               </a:rPr>
-              <a:t>-p always</a:t>
+              <a:t>-p</a:t>
+            </a:r>
+            <a:r>
+              <a:rPr>
+                <a:solidFill>
+                  <a:srgbClr val="B84E00"/>
+                </a:solidFill>
+              </a:rPr>
+              <a:t> always</a:t>
             </a:r>
             <a:r>
               <a:rPr sz="1950" b="0">
@@ -33744,7 +34039,29 @@
                 <a:ea typeface="Microsoft YaHei"/>
                 <a:cs typeface="Microsoft YaHei"/>
               </a:rPr>
-              <a:t>新目录没有旧缓存，必须重新提供应用与 BOARD 等输入。</a:t>
+              <a:t>新目录没有旧缓存，必须重新提供应用与 </a:t>
+            </a:r>
+            <a:r>
+              <a:rPr sz="1950" b="0">
+                <a:solidFill>
+                  <a:srgbClr val="B84E00"/>
+                </a:solidFill>
+                <a:latin typeface="Microsoft YaHei"/>
+                <a:ea typeface="Microsoft YaHei"/>
+                <a:cs typeface="Microsoft YaHei"/>
+              </a:rPr>
+              <a:t>BOARD</a:t>
+            </a:r>
+            <a:r>
+              <a:rPr sz="1950" b="0">
+                <a:solidFill>
+                  <a:srgbClr val="29263B"/>
+                </a:solidFill>
+                <a:latin typeface="Microsoft YaHei"/>
+                <a:ea typeface="Microsoft YaHei"/>
+                <a:cs typeface="Microsoft YaHei"/>
+              </a:rPr>
+              <a:t> 等输入。</a:t>
             </a:r>
           </a:p>
         </p:txBody>
@@ -33884,7 +34201,16 @@
               <a:rPr u="sng">
                 <a:hlinkClick r:id="rId4"/>
               </a:rPr>
-              <a:t>源码定位：cmake/pristine.cmake</a:t>
+              <a:t>源码定位：</a:t>
+            </a:r>
+            <a:r>
+              <a:rPr u="sng">
+                <a:solidFill>
+                  <a:srgbClr val="0070C0"/>
+                </a:solidFill>
+                <a:hlinkClick r:id="rId4"/>
+              </a:rPr>
+              <a:t>cmake/pristine.cmake</a:t>
             </a:r>
           </a:p>
         </p:txBody>
@@ -34287,7 +34613,7 @@
             <a:r>
               <a:rPr sz="1800" b="0">
                 <a:solidFill>
-                  <a:srgbClr val="29263B"/>
+                  <a:srgbClr val="646173"/>
                 </a:solidFill>
                 <a:latin typeface="Consolas"/>
                 <a:ea typeface="Consolas"/>
@@ -34295,106 +34621,130 @@
               </a:rPr>
               <a:t># UCRT64；.venv 已激活；本节的 learning-mps2 预设已创建。</a:t>
             </a:r>
-            <a:r>
-              <a:rPr>
-                <a:solidFill>
-                  <a:srgbClr val="A02B93"/>
-                </a:solidFill>
-              </a:rPr>
-              <a:t/>
-            </a:r>
-            <a:r>
-              <a:rPr sz="1800" b="0">
+          </a:p>
+          <a:p>
+            <a:pPr>
+              <a:lnSpc>
+                <a:spcPct val="120000"/>
+              </a:lnSpc>
+              <a:spcAft>
+                <a:spcPts val="0"/>
+              </a:spcAft>
+              <a:buNone/>
+              <a:defRPr sz="1800" b="0">
                 <a:solidFill>
                   <a:srgbClr val="29263B"/>
                 </a:solidFill>
                 <a:latin typeface="Consolas"/>
                 <a:ea typeface="Consolas"/>
                 <a:cs typeface="Consolas"/>
-              </a:rPr>
-              <a:t/>
-            </a:r>
-          </a:p>
-          <a:p>
-            <a:pPr>
-              <a:lnSpc>
-                <a:spcPct val="120000"/>
-              </a:lnSpc>
-              <a:spcAft>
-                <a:spcPts val="0"/>
-              </a:spcAft>
-              <a:buNone/>
-              <a:defRPr sz="1800" b="0">
+              </a:defRPr>
+            </a:pPr>
+            <a:r>
+              <a:rPr>
+                <a:solidFill>
+                  <a:srgbClr val="A02B93"/>
+                </a:solidFill>
+              </a:rPr>
+              <a:t>cd</a:t>
+            </a:r>
+            <a:r>
+              <a:rPr sz="1800" b="0">
                 <a:solidFill>
                   <a:srgbClr val="29263B"/>
                 </a:solidFill>
                 <a:latin typeface="Consolas"/>
                 <a:ea typeface="Consolas"/>
                 <a:cs typeface="Consolas"/>
-              </a:defRPr>
-            </a:pPr>
+              </a:rPr>
+              <a:t> </a:t>
+            </a:r>
             <a:r>
               <a:rPr>
                 <a:solidFill>
-                  <a:srgbClr val="A02B93"/>
-                </a:solidFill>
-              </a:rPr>
-              <a:t>cd</a:t>
-            </a:r>
-            <a:r>
-              <a:rPr sz="1800" b="0">
+                  <a:srgbClr val="0070C0"/>
+                </a:solidFill>
+              </a:rPr>
+              <a:t>/g/zephyr_practice/zephyr-main/samples/hello_world</a:t>
+            </a:r>
+          </a:p>
+          <a:p>
+            <a:pPr>
+              <a:lnSpc>
+                <a:spcPct val="120000"/>
+              </a:lnSpc>
+              <a:spcAft>
+                <a:spcPts val="0"/>
+              </a:spcAft>
+              <a:buNone/>
+              <a:defRPr sz="1800" b="0">
                 <a:solidFill>
                   <a:srgbClr val="29263B"/>
                 </a:solidFill>
                 <a:latin typeface="Consolas"/>
                 <a:ea typeface="Consolas"/>
                 <a:cs typeface="Consolas"/>
-              </a:rPr>
-              <a:t> </a:t>
-            </a:r>
+              </a:defRPr>
+            </a:pPr>
             <a:r>
               <a:rPr>
                 <a:solidFill>
-                  <a:srgbClr val="0070C0"/>
-                </a:solidFill>
-              </a:rPr>
-              <a:t>/g/zephyr_practice/zephyr-main/samples/hello_world</a:t>
-            </a:r>
-          </a:p>
-          <a:p>
-            <a:pPr>
-              <a:lnSpc>
-                <a:spcPct val="120000"/>
-              </a:lnSpc>
-              <a:spcAft>
-                <a:spcPts val="0"/>
-              </a:spcAft>
-              <a:buNone/>
-              <a:defRPr sz="1800" b="0">
+                  <a:srgbClr val="A02B93"/>
+                </a:solidFill>
+              </a:rPr>
+              <a:t>cmake</a:t>
+            </a:r>
+            <a:r>
+              <a:rPr sz="1800" b="0">
                 <a:solidFill>
                   <a:srgbClr val="29263B"/>
                 </a:solidFill>
                 <a:latin typeface="Consolas"/>
                 <a:ea typeface="Consolas"/>
                 <a:cs typeface="Consolas"/>
-              </a:defRPr>
-            </a:pPr>
+              </a:rPr>
+              <a:t> </a:t>
+            </a:r>
             <a:r>
               <a:rPr>
                 <a:solidFill>
-                  <a:srgbClr val="A02B93"/>
-                </a:solidFill>
-              </a:rPr>
-              <a:t>cmake</a:t>
-            </a:r>
-            <a:r>
-              <a:rPr sz="1800" b="0">
+                  <a:srgbClr val="B84E00"/>
+                </a:solidFill>
+              </a:rPr>
+              <a:t>--list-presets</a:t>
+            </a:r>
+          </a:p>
+          <a:p>
+            <a:pPr>
+              <a:lnSpc>
+                <a:spcPct val="120000"/>
+              </a:lnSpc>
+              <a:spcAft>
+                <a:spcPts val="0"/>
+              </a:spcAft>
+              <a:buNone/>
+              <a:defRPr sz="1800" b="0">
                 <a:solidFill>
                   <a:srgbClr val="29263B"/>
                 </a:solidFill>
                 <a:latin typeface="Consolas"/>
                 <a:ea typeface="Consolas"/>
                 <a:cs typeface="Consolas"/>
+              </a:defRPr>
+            </a:pPr>
+            <a:r>
+              <a:rPr>
+                <a:solidFill>
+                  <a:srgbClr val="A02B93"/>
+                </a:solidFill>
+              </a:rPr>
+              <a:t>cmake</a:t>
+            </a:r>
+            <a:r>
+              <a:rPr>
+                <a:solidFill>
+                  <a:srgbClr val="29263B"/>
+                </a:solidFill>
               </a:rPr>
               <a:t> </a:t>
             </a:r>
@@ -34404,7 +34754,15 @@
                   <a:srgbClr val="B84E00"/>
                 </a:solidFill>
               </a:rPr>
-              <a:t>--list-presets</a:t>
+              <a:t>--preset</a:t>
+            </a:r>
+            <a:r>
+              <a:rPr>
+                <a:solidFill>
+                  <a:srgbClr val="29263B"/>
+                </a:solidFill>
+              </a:rPr>
+              <a:t> learning-mps2</a:t>
             </a:r>
           </a:p>
           <a:p>
@@ -34431,18 +34789,15 @@
                   <a:srgbClr val="A02B93"/>
                 </a:solidFill>
               </a:rPr>
-              <a:t>cmake --preset learning-mps2</a:t>
-            </a:r>
-            <a:r>
-              <a:rPr sz="1800" b="0">
+              <a:t>cmake</a:t>
+            </a:r>
+            <a:r>
+              <a:rPr>
                 <a:solidFill>
                   <a:srgbClr val="29263B"/>
                 </a:solidFill>
-                <a:latin typeface="Consolas"/>
-                <a:ea typeface="Consolas"/>
-                <a:cs typeface="Consolas"/>
-              </a:rPr>
-              <a:t/>
+              </a:rPr>
+              <a:t> </a:t>
             </a:r>
             <a:r>
               <a:rPr>
@@ -34450,132 +34805,31 @@
                   <a:srgbClr val="B84E00"/>
                 </a:solidFill>
               </a:rPr>
-              <a:t/>
-            </a:r>
-            <a:r>
-              <a:rPr sz="1800" b="0">
+              <a:t>--build</a:t>
+            </a:r>
+            <a:r>
+              <a:rPr>
                 <a:solidFill>
                   <a:srgbClr val="29263B"/>
                 </a:solidFill>
-                <a:latin typeface="Consolas"/>
-                <a:ea typeface="Consolas"/>
-                <a:cs typeface="Consolas"/>
-              </a:rPr>
-              <a:t/>
+              </a:rPr>
+              <a:t> </a:t>
             </a:r>
             <a:r>
               <a:rPr>
                 <a:solidFill>
-                  <a:srgbClr val="A02B93"/>
-                </a:solidFill>
-              </a:rPr>
-              <a:t/>
-            </a:r>
-            <a:r>
-              <a:rPr sz="1800" b="0">
+                  <a:srgbClr val="B84E00"/>
+                </a:solidFill>
+              </a:rPr>
+              <a:t>--preset</a:t>
+            </a:r>
+            <a:r>
+              <a:rPr>
                 <a:solidFill>
                   <a:srgbClr val="29263B"/>
                 </a:solidFill>
-                <a:latin typeface="Consolas"/>
-                <a:ea typeface="Consolas"/>
-                <a:cs typeface="Consolas"/>
-              </a:rPr>
-              <a:t/>
-            </a:r>
-          </a:p>
-          <a:p>
-            <a:pPr>
-              <a:lnSpc>
-                <a:spcPct val="120000"/>
-              </a:lnSpc>
-              <a:spcAft>
-                <a:spcPts val="0"/>
-              </a:spcAft>
-              <a:buNone/>
-              <a:defRPr sz="1800" b="0">
-                <a:solidFill>
-                  <a:srgbClr val="29263B"/>
-                </a:solidFill>
-                <a:latin typeface="Consolas"/>
-                <a:ea typeface="Consolas"/>
-                <a:cs typeface="Consolas"/>
-              </a:defRPr>
-            </a:pPr>
-            <a:r>
-              <a:rPr>
-                <a:solidFill>
-                  <a:srgbClr val="A02B93"/>
-                </a:solidFill>
-              </a:rPr>
-              <a:t>cmake --build --preset learning-mps2</a:t>
-            </a:r>
-            <a:r>
-              <a:rPr sz="1800" b="0">
-                <a:solidFill>
-                  <a:srgbClr val="29263B"/>
-                </a:solidFill>
-                <a:latin typeface="Consolas"/>
-                <a:ea typeface="Consolas"/>
-                <a:cs typeface="Consolas"/>
-              </a:rPr>
-              <a:t/>
-            </a:r>
-            <a:r>
-              <a:rPr>
-                <a:solidFill>
-                  <a:srgbClr val="B84E00"/>
-                </a:solidFill>
-              </a:rPr>
-              <a:t/>
-            </a:r>
-            <a:r>
-              <a:rPr sz="1800" b="0">
-                <a:solidFill>
-                  <a:srgbClr val="29263B"/>
-                </a:solidFill>
-                <a:latin typeface="Consolas"/>
-                <a:ea typeface="Consolas"/>
-                <a:cs typeface="Consolas"/>
-              </a:rPr>
-              <a:t/>
-            </a:r>
-            <a:r>
-              <a:rPr>
-                <a:solidFill>
-                  <a:srgbClr val="B84E00"/>
-                </a:solidFill>
-              </a:rPr>
-              <a:t/>
-            </a:r>
-            <a:r>
-              <a:rPr sz="1800" b="0">
-                <a:solidFill>
-                  <a:srgbClr val="29263B"/>
-                </a:solidFill>
-                <a:latin typeface="Consolas"/>
-                <a:ea typeface="Consolas"/>
-                <a:cs typeface="Consolas"/>
-              </a:rPr>
-              <a:t/>
-            </a:r>
-            <a:r>
-              <a:rPr>
-                <a:solidFill>
-                  <a:srgbClr val="A02B93"/>
-                </a:solidFill>
-              </a:rPr>
-              <a:t/>
-            </a:r>
-            <a:r>
-              <a:rPr sz="1800" b="0">
-                <a:solidFill>
-                  <a:srgbClr val="29263B"/>
-                </a:solidFill>
-                <a:latin typeface="Consolas"/>
-                <a:ea typeface="Consolas"/>
-                <a:cs typeface="Consolas"/>
-              </a:rPr>
-              <a:t/>
+              </a:rPr>
+              <a:t> learning-mps2</a:t>
             </a:r>
           </a:p>
         </p:txBody>
@@ -34650,15 +34904,18 @@
                 <a:ea typeface="Microsoft YaHei"/>
                 <a:cs typeface="Microsoft YaHei"/>
               </a:rPr>
-              <a:t>先按 MD 10.1.1.6 在应用目录新建或合并 CMakeUserPresets.json。</a:t>
-            </a:r>
-            <a:r>
-              <a:rPr>
+              <a:t>先按 MD 10.1.1.6 在应用目录新建或合并 </a:t>
+            </a:r>
+            <a:r>
+              <a:rPr sz="1950" b="0">
                 <a:solidFill>
                   <a:srgbClr val="0070C0"/>
                 </a:solidFill>
-              </a:rPr>
-              <a:t/>
+                <a:latin typeface="Microsoft YaHei"/>
+                <a:ea typeface="Microsoft YaHei"/>
+                <a:cs typeface="Microsoft YaHei"/>
+              </a:rPr>
+              <a:t>CMakeUserPresets.json</a:t>
             </a:r>
             <a:r>
               <a:rPr sz="1950" b="0">
@@ -34669,7 +34926,7 @@
                 <a:ea typeface="Microsoft YaHei"/>
                 <a:cs typeface="Microsoft YaHei"/>
               </a:rPr>
-              <a:t/>
+              <a:t>。</a:t>
             </a:r>
           </a:p>
           <a:p>
@@ -34760,25 +35017,6 @@
                 <a:cs typeface="Microsoft YaHei"/>
               </a:rPr>
               <a:t>本节使用独立 cmake-presets 输出；完整 JSON 见配套正文。</a:t>
-            </a:r>
-            <a:r>
-              <a:rPr>
-                <a:solidFill>
-                  <a:srgbClr val="0070C0"/>
-                </a:solidFill>
-              </a:rPr>
-              <a:t/>
-            </a:r>
-            <a:r>
-              <a:rPr sz="1950" b="0">
-                <a:solidFill>
-                  <a:srgbClr val="29263B"/>
-                </a:solidFill>
-                <a:latin typeface="Microsoft YaHei"/>
-                <a:ea typeface="Microsoft YaHei"/>
-                <a:cs typeface="Microsoft YaHei"/>
-              </a:rPr>
-              <a:t/>
             </a:r>
           </a:p>
         </p:txBody>
@@ -34918,7 +35156,16 @@
               <a:rPr u="sng">
                 <a:hlinkClick r:id="rId4"/>
               </a:rPr>
-              <a:t>源码定位：doc/develop/application/index.rst</a:t>
+              <a:t>源码定位：</a:t>
+            </a:r>
+            <a:r>
+              <a:rPr u="sng">
+                <a:solidFill>
+                  <a:srgbClr val="0070C0"/>
+                </a:solidFill>
+                <a:hlinkClick r:id="rId4"/>
+              </a:rPr>
+              <a:t>doc/develop/application/index.rst</a:t>
             </a:r>
           </a:p>
         </p:txBody>
@@ -35705,7 +35952,31 @@
                 <a:cs typeface="Microsoft YaHei"/>
                 <a:hlinkClick r:id="rId4"/>
               </a:rPr>
-              <a:t>实现定位：cmake/modules/extensions.cmake · 4088 行附近</a:t>
+              <a:t>实现定位：</a:t>
+            </a:r>
+            <a:r>
+              <a:rPr sz="1275" b="0">
+                <a:solidFill>
+                  <a:srgbClr val="0070C0"/>
+                </a:solidFill>
+                <a:latin typeface="Microsoft YaHei"/>
+                <a:ea typeface="Microsoft YaHei"/>
+                <a:cs typeface="Microsoft YaHei"/>
+                <a:hlinkClick r:id="rId4"/>
+              </a:rPr>
+              <a:t>cmake/modules/extensions.cmake</a:t>
+            </a:r>
+            <a:r>
+              <a:rPr sz="1275" b="0">
+                <a:solidFill>
+                  <a:srgbClr val="397589"/>
+                </a:solidFill>
+                <a:latin typeface="Microsoft YaHei"/>
+                <a:ea typeface="Microsoft YaHei"/>
+                <a:cs typeface="Microsoft YaHei"/>
+                <a:hlinkClick r:id="rId4"/>
+              </a:rPr>
+              <a:t> · 4088 行附近</a:t>
             </a:r>
           </a:p>
         </p:txBody>
@@ -36407,7 +36678,19 @@
                 <a:cs typeface="Microsoft YaHei"/>
                 <a:hlinkClick r:id="rId3"/>
               </a:rPr>
-              <a:t>官方说明：doc/develop/modules.rst</a:t>
+              <a:t>官方说明：</a:t>
+            </a:r>
+            <a:r>
+              <a:rPr sz="1275" b="0">
+                <a:solidFill>
+                  <a:srgbClr val="0070C0"/>
+                </a:solidFill>
+                <a:latin typeface="Microsoft YaHei"/>
+                <a:ea typeface="Microsoft YaHei"/>
+                <a:cs typeface="Microsoft YaHei"/>
+                <a:hlinkClick r:id="rId3"/>
+              </a:rPr>
+              <a:t>doc/develop/modules.rst</a:t>
             </a:r>
           </a:p>
         </p:txBody>
@@ -36476,7 +36759,31 @@
                 <a:cs typeface="Microsoft YaHei"/>
                 <a:hlinkClick r:id="rId4"/>
               </a:rPr>
-              <a:t>实现定位：cmake/modules/zephyr_module.cmake · 34 行附近</a:t>
+              <a:t>实现定位：</a:t>
+            </a:r>
+            <a:r>
+              <a:rPr sz="1275" b="0">
+                <a:solidFill>
+                  <a:srgbClr val="0070C0"/>
+                </a:solidFill>
+                <a:latin typeface="Microsoft YaHei"/>
+                <a:ea typeface="Microsoft YaHei"/>
+                <a:cs typeface="Microsoft YaHei"/>
+                <a:hlinkClick r:id="rId4"/>
+              </a:rPr>
+              <a:t>cmake/modules/zephyr_module.cmake</a:t>
+            </a:r>
+            <a:r>
+              <a:rPr sz="1275" b="0">
+                <a:solidFill>
+                  <a:srgbClr val="397589"/>
+                </a:solidFill>
+                <a:latin typeface="Microsoft YaHei"/>
+                <a:ea typeface="Microsoft YaHei"/>
+                <a:cs typeface="Microsoft YaHei"/>
+                <a:hlinkClick r:id="rId4"/>
+              </a:rPr>
+              <a:t> · 34 行附近</a:t>
             </a:r>
           </a:p>
         </p:txBody>
@@ -37090,7 +37397,19 @@
                 <a:cs typeface="Microsoft YaHei"/>
                 <a:hlinkClick r:id="rId3"/>
               </a:rPr>
-              <a:t>官方说明：doc/build/cmake-ref/index.rst</a:t>
+              <a:t>官方说明：</a:t>
+            </a:r>
+            <a:r>
+              <a:rPr sz="1275" b="0">
+                <a:solidFill>
+                  <a:srgbClr val="0070C0"/>
+                </a:solidFill>
+                <a:latin typeface="Microsoft YaHei"/>
+                <a:ea typeface="Microsoft YaHei"/>
+                <a:cs typeface="Microsoft YaHei"/>
+                <a:hlinkClick r:id="rId3"/>
+              </a:rPr>
+              <a:t>doc/build/cmake-ref/index.rst</a:t>
             </a:r>
           </a:p>
         </p:txBody>
@@ -37159,7 +37478,31 @@
                 <a:cs typeface="Microsoft YaHei"/>
                 <a:hlinkClick r:id="rId4"/>
               </a:rPr>
-              <a:t>实现定位：cmake/modules/zephyr_default.cmake · 71 行附近</a:t>
+              <a:t>实现定位：</a:t>
+            </a:r>
+            <a:r>
+              <a:rPr sz="1275" b="0">
+                <a:solidFill>
+                  <a:srgbClr val="0070C0"/>
+                </a:solidFill>
+                <a:latin typeface="Microsoft YaHei"/>
+                <a:ea typeface="Microsoft YaHei"/>
+                <a:cs typeface="Microsoft YaHei"/>
+                <a:hlinkClick r:id="rId4"/>
+              </a:rPr>
+              <a:t>cmake/modules/zephyr_default.cmake</a:t>
+            </a:r>
+            <a:r>
+              <a:rPr sz="1275" b="0">
+                <a:solidFill>
+                  <a:srgbClr val="397589"/>
+                </a:solidFill>
+                <a:latin typeface="Microsoft YaHei"/>
+                <a:ea typeface="Microsoft YaHei"/>
+                <a:cs typeface="Microsoft YaHei"/>
+                <a:hlinkClick r:id="rId4"/>
+              </a:rPr>
+              <a:t> · 71 行附近</a:t>
             </a:r>
           </a:p>
         </p:txBody>
@@ -37828,7 +38171,19 @@
                 <a:cs typeface="Microsoft YaHei"/>
                 <a:hlinkClick r:id="rId3"/>
               </a:rPr>
-              <a:t>官方说明：doc/build/sysbuild/index.rst</a:t>
+              <a:t>官方说明：</a:t>
+            </a:r>
+            <a:r>
+              <a:rPr sz="1275" b="0">
+                <a:solidFill>
+                  <a:srgbClr val="0070C0"/>
+                </a:solidFill>
+                <a:latin typeface="Microsoft YaHei"/>
+                <a:ea typeface="Microsoft YaHei"/>
+                <a:cs typeface="Microsoft YaHei"/>
+                <a:hlinkClick r:id="rId3"/>
+              </a:rPr>
+              <a:t>doc/build/sysbuild/index.rst</a:t>
             </a:r>
           </a:p>
         </p:txBody>
@@ -37897,7 +38252,31 @@
                 <a:cs typeface="Microsoft YaHei"/>
                 <a:hlinkClick r:id="rId4"/>
               </a:rPr>
-              <a:t>实现定位：cmake/modules/zephyr_module.cmake · 34 行附近</a:t>
+              <a:t>实现定位：</a:t>
+            </a:r>
+            <a:r>
+              <a:rPr sz="1275" b="0">
+                <a:solidFill>
+                  <a:srgbClr val="0070C0"/>
+                </a:solidFill>
+                <a:latin typeface="Microsoft YaHei"/>
+                <a:ea typeface="Microsoft YaHei"/>
+                <a:cs typeface="Microsoft YaHei"/>
+                <a:hlinkClick r:id="rId4"/>
+              </a:rPr>
+              <a:t>cmake/modules/zephyr_module.cmake</a:t>
+            </a:r>
+            <a:r>
+              <a:rPr sz="1275" b="0">
+                <a:solidFill>
+                  <a:srgbClr val="397589"/>
+                </a:solidFill>
+                <a:latin typeface="Microsoft YaHei"/>
+                <a:ea typeface="Microsoft YaHei"/>
+                <a:cs typeface="Microsoft YaHei"/>
+                <a:hlinkClick r:id="rId4"/>
+              </a:rPr>
+              <a:t> · 34 行附近</a:t>
             </a:r>
           </a:p>
         </p:txBody>
@@ -38592,7 +38971,19 @@
                 <a:cs typeface="Microsoft YaHei"/>
                 <a:hlinkClick r:id="rId3"/>
               </a:rPr>
-              <a:t>官方说明：doc/build/cmake/index.rst</a:t>
+              <a:t>官方说明：</a:t>
+            </a:r>
+            <a:r>
+              <a:rPr sz="1275" b="0">
+                <a:solidFill>
+                  <a:srgbClr val="0070C0"/>
+                </a:solidFill>
+                <a:latin typeface="Microsoft YaHei"/>
+                <a:ea typeface="Microsoft YaHei"/>
+                <a:cs typeface="Microsoft YaHei"/>
+                <a:hlinkClick r:id="rId3"/>
+              </a:rPr>
+              <a:t>doc/build/cmake/index.rst</a:t>
             </a:r>
           </a:p>
         </p:txBody>
@@ -38661,7 +39052,31 @@
                 <a:cs typeface="Microsoft YaHei"/>
                 <a:hlinkClick r:id="rId4"/>
               </a:rPr>
-              <a:t>实现定位：cmake/modules/zephyr_module.cmake · 34 行附近</a:t>
+              <a:t>实现定位：</a:t>
+            </a:r>
+            <a:r>
+              <a:rPr sz="1275" b="0">
+                <a:solidFill>
+                  <a:srgbClr val="0070C0"/>
+                </a:solidFill>
+                <a:latin typeface="Microsoft YaHei"/>
+                <a:ea typeface="Microsoft YaHei"/>
+                <a:cs typeface="Microsoft YaHei"/>
+                <a:hlinkClick r:id="rId4"/>
+              </a:rPr>
+              <a:t>cmake/modules/zephyr_module.cmake</a:t>
+            </a:r>
+            <a:r>
+              <a:rPr sz="1275" b="0">
+                <a:solidFill>
+                  <a:srgbClr val="397589"/>
+                </a:solidFill>
+                <a:latin typeface="Microsoft YaHei"/>
+                <a:ea typeface="Microsoft YaHei"/>
+                <a:cs typeface="Microsoft YaHei"/>
+                <a:hlinkClick r:id="rId4"/>
+              </a:rPr>
+              <a:t> · 34 行附近</a:t>
             </a:r>
           </a:p>
         </p:txBody>
@@ -39253,7 +39668,19 @@
                 <a:cs typeface="Microsoft YaHei"/>
                 <a:hlinkClick r:id="rId3"/>
               </a:rPr>
-              <a:t>官方说明：doc/develop/application/index.rst</a:t>
+              <a:t>官方说明：</a:t>
+            </a:r>
+            <a:r>
+              <a:rPr sz="1275" b="0">
+                <a:solidFill>
+                  <a:srgbClr val="0070C0"/>
+                </a:solidFill>
+                <a:latin typeface="Microsoft YaHei"/>
+                <a:ea typeface="Microsoft YaHei"/>
+                <a:cs typeface="Microsoft YaHei"/>
+                <a:hlinkClick r:id="rId3"/>
+              </a:rPr>
+              <a:t>doc/develop/application/index.rst</a:t>
             </a:r>
           </a:p>
         </p:txBody>
@@ -39322,7 +39749,31 @@
                 <a:cs typeface="Microsoft YaHei"/>
                 <a:hlinkClick r:id="rId4"/>
               </a:rPr>
-              <a:t>实现定位：cmake/modules/zephyr_default.cmake · 71 行附近</a:t>
+              <a:t>实现定位：</a:t>
+            </a:r>
+            <a:r>
+              <a:rPr sz="1275" b="0">
+                <a:solidFill>
+                  <a:srgbClr val="0070C0"/>
+                </a:solidFill>
+                <a:latin typeface="Microsoft YaHei"/>
+                <a:ea typeface="Microsoft YaHei"/>
+                <a:cs typeface="Microsoft YaHei"/>
+                <a:hlinkClick r:id="rId4"/>
+              </a:rPr>
+              <a:t>cmake/modules/zephyr_default.cmake</a:t>
+            </a:r>
+            <a:r>
+              <a:rPr sz="1275" b="0">
+                <a:solidFill>
+                  <a:srgbClr val="397589"/>
+                </a:solidFill>
+                <a:latin typeface="Microsoft YaHei"/>
+                <a:ea typeface="Microsoft YaHei"/>
+                <a:cs typeface="Microsoft YaHei"/>
+                <a:hlinkClick r:id="rId4"/>
+              </a:rPr>
+              <a:t> · 71 行附近</a:t>
             </a:r>
           </a:p>
         </p:txBody>
@@ -39936,7 +40387,19 @@
                 <a:cs typeface="Microsoft YaHei"/>
                 <a:hlinkClick r:id="rId3"/>
               </a:rPr>
-              <a:t>官方说明：doc/build/cmake-ref/index.rst</a:t>
+              <a:t>官方说明：</a:t>
+            </a:r>
+            <a:r>
+              <a:rPr sz="1275" b="0">
+                <a:solidFill>
+                  <a:srgbClr val="0070C0"/>
+                </a:solidFill>
+                <a:latin typeface="Microsoft YaHei"/>
+                <a:ea typeface="Microsoft YaHei"/>
+                <a:cs typeface="Microsoft YaHei"/>
+                <a:hlinkClick r:id="rId3"/>
+              </a:rPr>
+              <a:t>doc/build/cmake-ref/index.rst</a:t>
             </a:r>
           </a:p>
         </p:txBody>
@@ -40005,7 +40468,31 @@
                 <a:cs typeface="Microsoft YaHei"/>
                 <a:hlinkClick r:id="rId4"/>
               </a:rPr>
-              <a:t>实现定位：doc/develop/application/index.rst · 3 行附近</a:t>
+              <a:t>实现定位：</a:t>
+            </a:r>
+            <a:r>
+              <a:rPr sz="1275" b="0">
+                <a:solidFill>
+                  <a:srgbClr val="0070C0"/>
+                </a:solidFill>
+                <a:latin typeface="Microsoft YaHei"/>
+                <a:ea typeface="Microsoft YaHei"/>
+                <a:cs typeface="Microsoft YaHei"/>
+                <a:hlinkClick r:id="rId4"/>
+              </a:rPr>
+              <a:t>doc/develop/application/index.rst</a:t>
+            </a:r>
+            <a:r>
+              <a:rPr sz="1275" b="0">
+                <a:solidFill>
+                  <a:srgbClr val="397589"/>
+                </a:solidFill>
+                <a:latin typeface="Microsoft YaHei"/>
+                <a:ea typeface="Microsoft YaHei"/>
+                <a:cs typeface="Microsoft YaHei"/>
+                <a:hlinkClick r:id="rId4"/>
+              </a:rPr>
+              <a:t> · 3 行附近</a:t>
             </a:r>
           </a:p>
         </p:txBody>
@@ -40674,7 +41161,19 @@
                 <a:cs typeface="Microsoft YaHei"/>
                 <a:hlinkClick r:id="rId3"/>
               </a:rPr>
-              <a:t>官方说明：doc/build/cmake-ref/module/extensions.rst</a:t>
+              <a:t>官方说明：</a:t>
+            </a:r>
+            <a:r>
+              <a:rPr sz="1275" b="0">
+                <a:solidFill>
+                  <a:srgbClr val="0070C0"/>
+                </a:solidFill>
+                <a:latin typeface="Microsoft YaHei"/>
+                <a:ea typeface="Microsoft YaHei"/>
+                <a:cs typeface="Microsoft YaHei"/>
+                <a:hlinkClick r:id="rId3"/>
+              </a:rPr>
+              <a:t>doc/build/cmake-ref/module/extensions.rst</a:t>
             </a:r>
           </a:p>
         </p:txBody>
@@ -40743,7 +41242,31 @@
                 <a:cs typeface="Microsoft YaHei"/>
                 <a:hlinkClick r:id="rId4"/>
               </a:rPr>
-              <a:t>实现定位：cmake/modules/extensions.cmake · 682 行附近</a:t>
+              <a:t>实现定位：</a:t>
+            </a:r>
+            <a:r>
+              <a:rPr sz="1275" b="0">
+                <a:solidFill>
+                  <a:srgbClr val="0070C0"/>
+                </a:solidFill>
+                <a:latin typeface="Microsoft YaHei"/>
+                <a:ea typeface="Microsoft YaHei"/>
+                <a:cs typeface="Microsoft YaHei"/>
+                <a:hlinkClick r:id="rId4"/>
+              </a:rPr>
+              <a:t>cmake/modules/extensions.cmake</a:t>
+            </a:r>
+            <a:r>
+              <a:rPr sz="1275" b="0">
+                <a:solidFill>
+                  <a:srgbClr val="397589"/>
+                </a:solidFill>
+                <a:latin typeface="Microsoft YaHei"/>
+                <a:ea typeface="Microsoft YaHei"/>
+                <a:cs typeface="Microsoft YaHei"/>
+                <a:hlinkClick r:id="rId4"/>
+              </a:rPr>
+              <a:t> · 682 行附近</a:t>
             </a:r>
           </a:p>
         </p:txBody>
